--- a/dapr3_lectures/block2_fa/img_sandbox/quickdiags.pptx
+++ b/dapr3_lectures/block2_fa/img_sandbox/quickdiags.pptx
@@ -2,13 +2,14 @@
 <file path=ppt/presentation.xml><?xml version="1.0" encoding="utf-8"?>
 <p:presentation xmlns:a="http://schemas.openxmlformats.org/drawingml/2006/main" xmlns:r="http://schemas.openxmlformats.org/officeDocument/2006/relationships" xmlns:p="http://schemas.openxmlformats.org/presentationml/2006/main" saveSubsetFonts="1">
   <p:sldMasterIdLst>
-    <p:sldMasterId id="2147483660" r:id="rId1"/>
+    <p:sldMasterId id="2147483684" r:id="rId1"/>
   </p:sldMasterIdLst>
   <p:sldIdLst>
-    <p:sldId id="256" r:id="rId2"/>
-    <p:sldId id="257" r:id="rId3"/>
+    <p:sldId id="258" r:id="rId2"/>
+    <p:sldId id="256" r:id="rId3"/>
+    <p:sldId id="257" r:id="rId4"/>
   </p:sldIdLst>
-  <p:sldSz cx="3600450" cy="2519363"/>
+  <p:sldSz cx="9906000" cy="6858000" type="A4"/>
   <p:notesSz cx="9144000" cy="6858000"/>
   <p:defaultTextStyle>
     <a:defPPr>
@@ -105,6 +106,11 @@
       </a:defRPr>
     </a:lvl9pPr>
   </p:defaultTextStyle>
+  <p:extLst>
+    <p:ext uri="{EFAFB233-063F-42B5-8137-9DF3F51BA10A}">
+      <p15:sldGuideLst xmlns:p15="http://schemas.microsoft.com/office/powerpoint/2012/main"/>
+    </p:ext>
+  </p:extLst>
 </p:presentation>
 </file>
 
@@ -137,15 +143,15 @@
         </p:nvSpPr>
         <p:spPr>
           <a:xfrm>
-            <a:off x="270034" y="412312"/>
-            <a:ext cx="3060383" cy="877112"/>
+            <a:off x="742950" y="1122363"/>
+            <a:ext cx="8420100" cy="2387600"/>
           </a:xfrm>
         </p:spPr>
         <p:txBody>
           <a:bodyPr anchor="b"/>
           <a:lstStyle>
             <a:lvl1pPr algn="ctr">
-              <a:defRPr sz="2204"/>
+              <a:defRPr sz="6000"/>
             </a:lvl1pPr>
           </a:lstStyle>
           <a:p>
@@ -169,8 +175,8 @@
         </p:nvSpPr>
         <p:spPr>
           <a:xfrm>
-            <a:off x="450056" y="1323249"/>
-            <a:ext cx="2700338" cy="608263"/>
+            <a:off x="1238250" y="3602038"/>
+            <a:ext cx="7429500" cy="1655762"/>
           </a:xfrm>
         </p:spPr>
         <p:txBody>
@@ -178,39 +184,39 @@
           <a:lstStyle>
             <a:lvl1pPr marL="0" indent="0" algn="ctr">
               <a:buNone/>
-              <a:defRPr sz="882"/>
+              <a:defRPr sz="2400"/>
             </a:lvl1pPr>
-            <a:lvl2pPr marL="167975" indent="0" algn="ctr">
-              <a:buNone/>
-              <a:defRPr sz="735"/>
+            <a:lvl2pPr marL="457200" indent="0" algn="ctr">
+              <a:buNone/>
+              <a:defRPr sz="2000"/>
             </a:lvl2pPr>
-            <a:lvl3pPr marL="335951" indent="0" algn="ctr">
-              <a:buNone/>
-              <a:defRPr sz="661"/>
+            <a:lvl3pPr marL="914400" indent="0" algn="ctr">
+              <a:buNone/>
+              <a:defRPr sz="1800"/>
             </a:lvl3pPr>
-            <a:lvl4pPr marL="503926" indent="0" algn="ctr">
-              <a:buNone/>
-              <a:defRPr sz="588"/>
+            <a:lvl4pPr marL="1371600" indent="0" algn="ctr">
+              <a:buNone/>
+              <a:defRPr sz="1600"/>
             </a:lvl4pPr>
-            <a:lvl5pPr marL="671901" indent="0" algn="ctr">
-              <a:buNone/>
-              <a:defRPr sz="588"/>
+            <a:lvl5pPr marL="1828800" indent="0" algn="ctr">
+              <a:buNone/>
+              <a:defRPr sz="1600"/>
             </a:lvl5pPr>
-            <a:lvl6pPr marL="839876" indent="0" algn="ctr">
-              <a:buNone/>
-              <a:defRPr sz="588"/>
+            <a:lvl6pPr marL="2286000" indent="0" algn="ctr">
+              <a:buNone/>
+              <a:defRPr sz="1600"/>
             </a:lvl6pPr>
-            <a:lvl7pPr marL="1007852" indent="0" algn="ctr">
-              <a:buNone/>
-              <a:defRPr sz="588"/>
+            <a:lvl7pPr marL="2743200" indent="0" algn="ctr">
+              <a:buNone/>
+              <a:defRPr sz="1600"/>
             </a:lvl7pPr>
-            <a:lvl8pPr marL="1175827" indent="0" algn="ctr">
-              <a:buNone/>
-              <a:defRPr sz="588"/>
+            <a:lvl8pPr marL="3200400" indent="0" algn="ctr">
+              <a:buNone/>
+              <a:defRPr sz="1600"/>
             </a:lvl8pPr>
-            <a:lvl9pPr marL="1343802" indent="0" algn="ctr">
-              <a:buNone/>
-              <a:defRPr sz="588"/>
+            <a:lvl9pPr marL="3657600" indent="0" algn="ctr">
+              <a:buNone/>
+              <a:defRPr sz="1600"/>
             </a:lvl9pPr>
           </a:lstStyle>
           <a:p>
@@ -239,7 +245,7 @@
           <a:p>
             <a:fld id="{DD923110-092B-4D02-B6E6-5995FEB1C911}" type="datetimeFigureOut">
               <a:rPr lang="en-GB" smtClean="0"/>
-              <a:t>30/09/2025</a:t>
+              <a:t>11/06/2026</a:t>
             </a:fld>
             <a:endParaRPr lang="en-GB"/>
           </a:p>
@@ -290,7 +296,7 @@
     </p:spTree>
     <p:extLst>
       <p:ext uri="{BB962C8B-B14F-4D97-AF65-F5344CB8AC3E}">
-        <p14:creationId xmlns:p14="http://schemas.microsoft.com/office/powerpoint/2010/main" val="4007350727"/>
+        <p14:creationId xmlns:p14="http://schemas.microsoft.com/office/powerpoint/2010/main" val="2660960153"/>
       </p:ext>
     </p:extLst>
   </p:cSld>
@@ -409,7 +415,7 @@
           <a:p>
             <a:fld id="{DD923110-092B-4D02-B6E6-5995FEB1C911}" type="datetimeFigureOut">
               <a:rPr lang="en-GB" smtClean="0"/>
-              <a:t>30/09/2025</a:t>
+              <a:t>11/06/2026</a:t>
             </a:fld>
             <a:endParaRPr lang="en-GB"/>
           </a:p>
@@ -460,7 +466,7 @@
     </p:spTree>
     <p:extLst>
       <p:ext uri="{BB962C8B-B14F-4D97-AF65-F5344CB8AC3E}">
-        <p14:creationId xmlns:p14="http://schemas.microsoft.com/office/powerpoint/2010/main" val="1357163432"/>
+        <p14:creationId xmlns:p14="http://schemas.microsoft.com/office/powerpoint/2010/main" val="3253458347"/>
       </p:ext>
     </p:extLst>
   </p:cSld>
@@ -499,8 +505,8 @@
         </p:nvSpPr>
         <p:spPr>
           <a:xfrm>
-            <a:off x="2576572" y="134133"/>
-            <a:ext cx="776347" cy="2135044"/>
+            <a:off x="7088982" y="365125"/>
+            <a:ext cx="2135981" cy="5811838"/>
           </a:xfrm>
         </p:spPr>
         <p:txBody>
@@ -527,8 +533,8 @@
         </p:nvSpPr>
         <p:spPr>
           <a:xfrm>
-            <a:off x="247531" y="134133"/>
-            <a:ext cx="2284035" cy="2135044"/>
+            <a:off x="681038" y="365125"/>
+            <a:ext cx="6284119" cy="5811838"/>
           </a:xfrm>
         </p:spPr>
         <p:txBody>
@@ -589,7 +595,7 @@
           <a:p>
             <a:fld id="{DD923110-092B-4D02-B6E6-5995FEB1C911}" type="datetimeFigureOut">
               <a:rPr lang="en-GB" smtClean="0"/>
-              <a:t>30/09/2025</a:t>
+              <a:t>11/06/2026</a:t>
             </a:fld>
             <a:endParaRPr lang="en-GB"/>
           </a:p>
@@ -640,7 +646,7 @@
     </p:spTree>
     <p:extLst>
       <p:ext uri="{BB962C8B-B14F-4D97-AF65-F5344CB8AC3E}">
-        <p14:creationId xmlns:p14="http://schemas.microsoft.com/office/powerpoint/2010/main" val="2851639526"/>
+        <p14:creationId xmlns:p14="http://schemas.microsoft.com/office/powerpoint/2010/main" val="3979649866"/>
       </p:ext>
     </p:extLst>
   </p:cSld>
@@ -759,7 +765,7 @@
           <a:p>
             <a:fld id="{DD923110-092B-4D02-B6E6-5995FEB1C911}" type="datetimeFigureOut">
               <a:rPr lang="en-GB" smtClean="0"/>
-              <a:t>30/09/2025</a:t>
+              <a:t>11/06/2026</a:t>
             </a:fld>
             <a:endParaRPr lang="en-GB"/>
           </a:p>
@@ -810,7 +816,7 @@
     </p:spTree>
     <p:extLst>
       <p:ext uri="{BB962C8B-B14F-4D97-AF65-F5344CB8AC3E}">
-        <p14:creationId xmlns:p14="http://schemas.microsoft.com/office/powerpoint/2010/main" val="876148522"/>
+        <p14:creationId xmlns:p14="http://schemas.microsoft.com/office/powerpoint/2010/main" val="2051525563"/>
       </p:ext>
     </p:extLst>
   </p:cSld>
@@ -849,15 +855,15 @@
         </p:nvSpPr>
         <p:spPr>
           <a:xfrm>
-            <a:off x="245656" y="628092"/>
-            <a:ext cx="3105388" cy="1047985"/>
+            <a:off x="675879" y="1709740"/>
+            <a:ext cx="8543925" cy="2852737"/>
           </a:xfrm>
         </p:spPr>
         <p:txBody>
           <a:bodyPr anchor="b"/>
           <a:lstStyle>
             <a:lvl1pPr>
-              <a:defRPr sz="2204"/>
+              <a:defRPr sz="6000"/>
             </a:lvl1pPr>
           </a:lstStyle>
           <a:p>
@@ -881,8 +887,8 @@
         </p:nvSpPr>
         <p:spPr>
           <a:xfrm>
-            <a:off x="245656" y="1685991"/>
-            <a:ext cx="3105388" cy="551110"/>
+            <a:off x="675879" y="4589465"/>
+            <a:ext cx="8543925" cy="1500187"/>
           </a:xfrm>
         </p:spPr>
         <p:txBody>
@@ -890,15 +896,15 @@
           <a:lstStyle>
             <a:lvl1pPr marL="0" indent="0">
               <a:buNone/>
-              <a:defRPr sz="882">
+              <a:defRPr sz="2400">
                 <a:solidFill>
                   <a:schemeClr val="tx1"/>
                 </a:solidFill>
               </a:defRPr>
             </a:lvl1pPr>
-            <a:lvl2pPr marL="167975" indent="0">
-              <a:buNone/>
-              <a:defRPr sz="735">
+            <a:lvl2pPr marL="457200" indent="0">
+              <a:buNone/>
+              <a:defRPr sz="2000">
                 <a:solidFill>
                   <a:schemeClr val="tx1">
                     <a:tint val="75000"/>
@@ -906,9 +912,9 @@
                 </a:solidFill>
               </a:defRPr>
             </a:lvl2pPr>
-            <a:lvl3pPr marL="335951" indent="0">
-              <a:buNone/>
-              <a:defRPr sz="661">
+            <a:lvl3pPr marL="914400" indent="0">
+              <a:buNone/>
+              <a:defRPr sz="1800">
                 <a:solidFill>
                   <a:schemeClr val="tx1">
                     <a:tint val="75000"/>
@@ -916,9 +922,9 @@
                 </a:solidFill>
               </a:defRPr>
             </a:lvl3pPr>
-            <a:lvl4pPr marL="503926" indent="0">
-              <a:buNone/>
-              <a:defRPr sz="588">
+            <a:lvl4pPr marL="1371600" indent="0">
+              <a:buNone/>
+              <a:defRPr sz="1600">
                 <a:solidFill>
                   <a:schemeClr val="tx1">
                     <a:tint val="75000"/>
@@ -926,9 +932,9 @@
                 </a:solidFill>
               </a:defRPr>
             </a:lvl4pPr>
-            <a:lvl5pPr marL="671901" indent="0">
-              <a:buNone/>
-              <a:defRPr sz="588">
+            <a:lvl5pPr marL="1828800" indent="0">
+              <a:buNone/>
+              <a:defRPr sz="1600">
                 <a:solidFill>
                   <a:schemeClr val="tx1">
                     <a:tint val="75000"/>
@@ -936,9 +942,9 @@
                 </a:solidFill>
               </a:defRPr>
             </a:lvl5pPr>
-            <a:lvl6pPr marL="839876" indent="0">
-              <a:buNone/>
-              <a:defRPr sz="588">
+            <a:lvl6pPr marL="2286000" indent="0">
+              <a:buNone/>
+              <a:defRPr sz="1600">
                 <a:solidFill>
                   <a:schemeClr val="tx1">
                     <a:tint val="75000"/>
@@ -946,9 +952,9 @@
                 </a:solidFill>
               </a:defRPr>
             </a:lvl6pPr>
-            <a:lvl7pPr marL="1007852" indent="0">
-              <a:buNone/>
-              <a:defRPr sz="588">
+            <a:lvl7pPr marL="2743200" indent="0">
+              <a:buNone/>
+              <a:defRPr sz="1600">
                 <a:solidFill>
                   <a:schemeClr val="tx1">
                     <a:tint val="75000"/>
@@ -956,9 +962,9 @@
                 </a:solidFill>
               </a:defRPr>
             </a:lvl7pPr>
-            <a:lvl8pPr marL="1175827" indent="0">
-              <a:buNone/>
-              <a:defRPr sz="588">
+            <a:lvl8pPr marL="3200400" indent="0">
+              <a:buNone/>
+              <a:defRPr sz="1600">
                 <a:solidFill>
                   <a:schemeClr val="tx1">
                     <a:tint val="75000"/>
@@ -966,9 +972,9 @@
                 </a:solidFill>
               </a:defRPr>
             </a:lvl8pPr>
-            <a:lvl9pPr marL="1343802" indent="0">
-              <a:buNone/>
-              <a:defRPr sz="588">
+            <a:lvl9pPr marL="3657600" indent="0">
+              <a:buNone/>
+              <a:defRPr sz="1600">
                 <a:solidFill>
                   <a:schemeClr val="tx1">
                     <a:tint val="75000"/>
@@ -1003,7 +1009,7 @@
           <a:p>
             <a:fld id="{DD923110-092B-4D02-B6E6-5995FEB1C911}" type="datetimeFigureOut">
               <a:rPr lang="en-GB" smtClean="0"/>
-              <a:t>30/09/2025</a:t>
+              <a:t>11/06/2026</a:t>
             </a:fld>
             <a:endParaRPr lang="en-GB"/>
           </a:p>
@@ -1054,7 +1060,7 @@
     </p:spTree>
     <p:extLst>
       <p:ext uri="{BB962C8B-B14F-4D97-AF65-F5344CB8AC3E}">
-        <p14:creationId xmlns:p14="http://schemas.microsoft.com/office/powerpoint/2010/main" val="4283654670"/>
+        <p14:creationId xmlns:p14="http://schemas.microsoft.com/office/powerpoint/2010/main" val="1820947926"/>
       </p:ext>
     </p:extLst>
   </p:cSld>
@@ -1116,8 +1122,8 @@
         </p:nvSpPr>
         <p:spPr>
           <a:xfrm>
-            <a:off x="247531" y="670664"/>
-            <a:ext cx="1530191" cy="1598513"/>
+            <a:off x="681038" y="1825625"/>
+            <a:ext cx="4210050" cy="4351338"/>
           </a:xfrm>
         </p:spPr>
         <p:txBody>
@@ -1173,8 +1179,8 @@
         </p:nvSpPr>
         <p:spPr>
           <a:xfrm>
-            <a:off x="1822728" y="670664"/>
-            <a:ext cx="1530191" cy="1598513"/>
+            <a:off x="5014913" y="1825625"/>
+            <a:ext cx="4210050" cy="4351338"/>
           </a:xfrm>
         </p:spPr>
         <p:txBody>
@@ -1235,7 +1241,7 @@
           <a:p>
             <a:fld id="{DD923110-092B-4D02-B6E6-5995FEB1C911}" type="datetimeFigureOut">
               <a:rPr lang="en-GB" smtClean="0"/>
-              <a:t>30/09/2025</a:t>
+              <a:t>11/06/2026</a:t>
             </a:fld>
             <a:endParaRPr lang="en-GB"/>
           </a:p>
@@ -1286,7 +1292,7 @@
     </p:spTree>
     <p:extLst>
       <p:ext uri="{BB962C8B-B14F-4D97-AF65-F5344CB8AC3E}">
-        <p14:creationId xmlns:p14="http://schemas.microsoft.com/office/powerpoint/2010/main" val="1262255157"/>
+        <p14:creationId xmlns:p14="http://schemas.microsoft.com/office/powerpoint/2010/main" val="3080750158"/>
       </p:ext>
     </p:extLst>
   </p:cSld>
@@ -1325,8 +1331,8 @@
         </p:nvSpPr>
         <p:spPr>
           <a:xfrm>
-            <a:off x="248000" y="134133"/>
-            <a:ext cx="3105388" cy="486960"/>
+            <a:off x="682328" y="365127"/>
+            <a:ext cx="8543925" cy="1325563"/>
           </a:xfrm>
         </p:spPr>
         <p:txBody>
@@ -1353,8 +1359,8 @@
         </p:nvSpPr>
         <p:spPr>
           <a:xfrm>
-            <a:off x="248000" y="617594"/>
-            <a:ext cx="1523159" cy="302673"/>
+            <a:off x="682329" y="1681163"/>
+            <a:ext cx="4190702" cy="823912"/>
           </a:xfrm>
         </p:spPr>
         <p:txBody>
@@ -1362,39 +1368,39 @@
           <a:lstStyle>
             <a:lvl1pPr marL="0" indent="0">
               <a:buNone/>
-              <a:defRPr sz="882" b="1"/>
+              <a:defRPr sz="2400" b="1"/>
             </a:lvl1pPr>
-            <a:lvl2pPr marL="167975" indent="0">
-              <a:buNone/>
-              <a:defRPr sz="735" b="1"/>
+            <a:lvl2pPr marL="457200" indent="0">
+              <a:buNone/>
+              <a:defRPr sz="2000" b="1"/>
             </a:lvl2pPr>
-            <a:lvl3pPr marL="335951" indent="0">
-              <a:buNone/>
-              <a:defRPr sz="661" b="1"/>
+            <a:lvl3pPr marL="914400" indent="0">
+              <a:buNone/>
+              <a:defRPr sz="1800" b="1"/>
             </a:lvl3pPr>
-            <a:lvl4pPr marL="503926" indent="0">
-              <a:buNone/>
-              <a:defRPr sz="588" b="1"/>
+            <a:lvl4pPr marL="1371600" indent="0">
+              <a:buNone/>
+              <a:defRPr sz="1600" b="1"/>
             </a:lvl4pPr>
-            <a:lvl5pPr marL="671901" indent="0">
-              <a:buNone/>
-              <a:defRPr sz="588" b="1"/>
+            <a:lvl5pPr marL="1828800" indent="0">
+              <a:buNone/>
+              <a:defRPr sz="1600" b="1"/>
             </a:lvl5pPr>
-            <a:lvl6pPr marL="839876" indent="0">
-              <a:buNone/>
-              <a:defRPr sz="588" b="1"/>
+            <a:lvl6pPr marL="2286000" indent="0">
+              <a:buNone/>
+              <a:defRPr sz="1600" b="1"/>
             </a:lvl6pPr>
-            <a:lvl7pPr marL="1007852" indent="0">
-              <a:buNone/>
-              <a:defRPr sz="588" b="1"/>
+            <a:lvl7pPr marL="2743200" indent="0">
+              <a:buNone/>
+              <a:defRPr sz="1600" b="1"/>
             </a:lvl7pPr>
-            <a:lvl8pPr marL="1175827" indent="0">
-              <a:buNone/>
-              <a:defRPr sz="588" b="1"/>
+            <a:lvl8pPr marL="3200400" indent="0">
+              <a:buNone/>
+              <a:defRPr sz="1600" b="1"/>
             </a:lvl8pPr>
-            <a:lvl9pPr marL="1343802" indent="0">
-              <a:buNone/>
-              <a:defRPr sz="588" b="1"/>
+            <a:lvl9pPr marL="3657600" indent="0">
+              <a:buNone/>
+              <a:defRPr sz="1600" b="1"/>
             </a:lvl9pPr>
           </a:lstStyle>
           <a:p>
@@ -1418,8 +1424,8 @@
         </p:nvSpPr>
         <p:spPr>
           <a:xfrm>
-            <a:off x="248000" y="920267"/>
-            <a:ext cx="1523159" cy="1353575"/>
+            <a:off x="682329" y="2505075"/>
+            <a:ext cx="4190702" cy="3684588"/>
           </a:xfrm>
         </p:spPr>
         <p:txBody>
@@ -1475,8 +1481,8 @@
         </p:nvSpPr>
         <p:spPr>
           <a:xfrm>
-            <a:off x="1822728" y="617594"/>
-            <a:ext cx="1530660" cy="302673"/>
+            <a:off x="5014913" y="1681163"/>
+            <a:ext cx="4211340" cy="823912"/>
           </a:xfrm>
         </p:spPr>
         <p:txBody>
@@ -1484,39 +1490,39 @@
           <a:lstStyle>
             <a:lvl1pPr marL="0" indent="0">
               <a:buNone/>
-              <a:defRPr sz="882" b="1"/>
+              <a:defRPr sz="2400" b="1"/>
             </a:lvl1pPr>
-            <a:lvl2pPr marL="167975" indent="0">
-              <a:buNone/>
-              <a:defRPr sz="735" b="1"/>
+            <a:lvl2pPr marL="457200" indent="0">
+              <a:buNone/>
+              <a:defRPr sz="2000" b="1"/>
             </a:lvl2pPr>
-            <a:lvl3pPr marL="335951" indent="0">
-              <a:buNone/>
-              <a:defRPr sz="661" b="1"/>
+            <a:lvl3pPr marL="914400" indent="0">
+              <a:buNone/>
+              <a:defRPr sz="1800" b="1"/>
             </a:lvl3pPr>
-            <a:lvl4pPr marL="503926" indent="0">
-              <a:buNone/>
-              <a:defRPr sz="588" b="1"/>
+            <a:lvl4pPr marL="1371600" indent="0">
+              <a:buNone/>
+              <a:defRPr sz="1600" b="1"/>
             </a:lvl4pPr>
-            <a:lvl5pPr marL="671901" indent="0">
-              <a:buNone/>
-              <a:defRPr sz="588" b="1"/>
+            <a:lvl5pPr marL="1828800" indent="0">
+              <a:buNone/>
+              <a:defRPr sz="1600" b="1"/>
             </a:lvl5pPr>
-            <a:lvl6pPr marL="839876" indent="0">
-              <a:buNone/>
-              <a:defRPr sz="588" b="1"/>
+            <a:lvl6pPr marL="2286000" indent="0">
+              <a:buNone/>
+              <a:defRPr sz="1600" b="1"/>
             </a:lvl6pPr>
-            <a:lvl7pPr marL="1007852" indent="0">
-              <a:buNone/>
-              <a:defRPr sz="588" b="1"/>
+            <a:lvl7pPr marL="2743200" indent="0">
+              <a:buNone/>
+              <a:defRPr sz="1600" b="1"/>
             </a:lvl7pPr>
-            <a:lvl8pPr marL="1175827" indent="0">
-              <a:buNone/>
-              <a:defRPr sz="588" b="1"/>
+            <a:lvl8pPr marL="3200400" indent="0">
+              <a:buNone/>
+              <a:defRPr sz="1600" b="1"/>
             </a:lvl8pPr>
-            <a:lvl9pPr marL="1343802" indent="0">
-              <a:buNone/>
-              <a:defRPr sz="588" b="1"/>
+            <a:lvl9pPr marL="3657600" indent="0">
+              <a:buNone/>
+              <a:defRPr sz="1600" b="1"/>
             </a:lvl9pPr>
           </a:lstStyle>
           <a:p>
@@ -1540,8 +1546,8 @@
         </p:nvSpPr>
         <p:spPr>
           <a:xfrm>
-            <a:off x="1822728" y="920267"/>
-            <a:ext cx="1530660" cy="1353575"/>
+            <a:off x="5014913" y="2505075"/>
+            <a:ext cx="4211340" cy="3684588"/>
           </a:xfrm>
         </p:spPr>
         <p:txBody>
@@ -1602,7 +1608,7 @@
           <a:p>
             <a:fld id="{DD923110-092B-4D02-B6E6-5995FEB1C911}" type="datetimeFigureOut">
               <a:rPr lang="en-GB" smtClean="0"/>
-              <a:t>30/09/2025</a:t>
+              <a:t>11/06/2026</a:t>
             </a:fld>
             <a:endParaRPr lang="en-GB"/>
           </a:p>
@@ -1653,7 +1659,7 @@
     </p:spTree>
     <p:extLst>
       <p:ext uri="{BB962C8B-B14F-4D97-AF65-F5344CB8AC3E}">
-        <p14:creationId xmlns:p14="http://schemas.microsoft.com/office/powerpoint/2010/main" val="3941195460"/>
+        <p14:creationId xmlns:p14="http://schemas.microsoft.com/office/powerpoint/2010/main" val="3260162317"/>
       </p:ext>
     </p:extLst>
   </p:cSld>
@@ -1720,7 +1726,7 @@
           <a:p>
             <a:fld id="{DD923110-092B-4D02-B6E6-5995FEB1C911}" type="datetimeFigureOut">
               <a:rPr lang="en-GB" smtClean="0"/>
-              <a:t>30/09/2025</a:t>
+              <a:t>11/06/2026</a:t>
             </a:fld>
             <a:endParaRPr lang="en-GB"/>
           </a:p>
@@ -1771,7 +1777,7 @@
     </p:spTree>
     <p:extLst>
       <p:ext uri="{BB962C8B-B14F-4D97-AF65-F5344CB8AC3E}">
-        <p14:creationId xmlns:p14="http://schemas.microsoft.com/office/powerpoint/2010/main" val="3986418748"/>
+        <p14:creationId xmlns:p14="http://schemas.microsoft.com/office/powerpoint/2010/main" val="1323251151"/>
       </p:ext>
     </p:extLst>
   </p:cSld>
@@ -1815,7 +1821,7 @@
           <a:p>
             <a:fld id="{DD923110-092B-4D02-B6E6-5995FEB1C911}" type="datetimeFigureOut">
               <a:rPr lang="en-GB" smtClean="0"/>
-              <a:t>30/09/2025</a:t>
+              <a:t>11/06/2026</a:t>
             </a:fld>
             <a:endParaRPr lang="en-GB"/>
           </a:p>
@@ -1866,7 +1872,7 @@
     </p:spTree>
     <p:extLst>
       <p:ext uri="{BB962C8B-B14F-4D97-AF65-F5344CB8AC3E}">
-        <p14:creationId xmlns:p14="http://schemas.microsoft.com/office/powerpoint/2010/main" val="937585972"/>
+        <p14:creationId xmlns:p14="http://schemas.microsoft.com/office/powerpoint/2010/main" val="2117866700"/>
       </p:ext>
     </p:extLst>
   </p:cSld>
@@ -1905,15 +1911,15 @@
         </p:nvSpPr>
         <p:spPr>
           <a:xfrm>
-            <a:off x="248000" y="167958"/>
-            <a:ext cx="1161239" cy="587851"/>
+            <a:off x="682328" y="457200"/>
+            <a:ext cx="3194943" cy="1600200"/>
           </a:xfrm>
         </p:spPr>
         <p:txBody>
           <a:bodyPr anchor="b"/>
           <a:lstStyle>
             <a:lvl1pPr>
-              <a:defRPr sz="1176"/>
+              <a:defRPr sz="3200"/>
             </a:lvl1pPr>
           </a:lstStyle>
           <a:p>
@@ -1937,39 +1943,39 @@
         </p:nvSpPr>
         <p:spPr>
           <a:xfrm>
-            <a:off x="1530660" y="362742"/>
-            <a:ext cx="1822728" cy="1790381"/>
+            <a:off x="4211340" y="987427"/>
+            <a:ext cx="5014913" cy="4873625"/>
           </a:xfrm>
         </p:spPr>
         <p:txBody>
           <a:bodyPr/>
           <a:lstStyle>
             <a:lvl1pPr>
-              <a:defRPr sz="1176"/>
+              <a:defRPr sz="3200"/>
             </a:lvl1pPr>
             <a:lvl2pPr>
-              <a:defRPr sz="1029"/>
+              <a:defRPr sz="2800"/>
             </a:lvl2pPr>
             <a:lvl3pPr>
-              <a:defRPr sz="882"/>
+              <a:defRPr sz="2400"/>
             </a:lvl3pPr>
             <a:lvl4pPr>
-              <a:defRPr sz="735"/>
+              <a:defRPr sz="2000"/>
             </a:lvl4pPr>
             <a:lvl5pPr>
-              <a:defRPr sz="735"/>
+              <a:defRPr sz="2000"/>
             </a:lvl5pPr>
             <a:lvl6pPr>
-              <a:defRPr sz="735"/>
+              <a:defRPr sz="2000"/>
             </a:lvl6pPr>
             <a:lvl7pPr>
-              <a:defRPr sz="735"/>
+              <a:defRPr sz="2000"/>
             </a:lvl7pPr>
             <a:lvl8pPr>
-              <a:defRPr sz="735"/>
+              <a:defRPr sz="2000"/>
             </a:lvl8pPr>
             <a:lvl9pPr>
-              <a:defRPr sz="735"/>
+              <a:defRPr sz="2000"/>
             </a:lvl9pPr>
           </a:lstStyle>
           <a:p>
@@ -2022,8 +2028,8 @@
         </p:nvSpPr>
         <p:spPr>
           <a:xfrm>
-            <a:off x="248000" y="755809"/>
-            <a:ext cx="1161239" cy="1400229"/>
+            <a:off x="682328" y="2057400"/>
+            <a:ext cx="3194943" cy="3811588"/>
           </a:xfrm>
         </p:spPr>
         <p:txBody>
@@ -2031,39 +2037,39 @@
           <a:lstStyle>
             <a:lvl1pPr marL="0" indent="0">
               <a:buNone/>
-              <a:defRPr sz="588"/>
+              <a:defRPr sz="1600"/>
             </a:lvl1pPr>
-            <a:lvl2pPr marL="167975" indent="0">
-              <a:buNone/>
-              <a:defRPr sz="514"/>
+            <a:lvl2pPr marL="457200" indent="0">
+              <a:buNone/>
+              <a:defRPr sz="1400"/>
             </a:lvl2pPr>
-            <a:lvl3pPr marL="335951" indent="0">
-              <a:buNone/>
-              <a:defRPr sz="441"/>
+            <a:lvl3pPr marL="914400" indent="0">
+              <a:buNone/>
+              <a:defRPr sz="1200"/>
             </a:lvl3pPr>
-            <a:lvl4pPr marL="503926" indent="0">
-              <a:buNone/>
-              <a:defRPr sz="367"/>
+            <a:lvl4pPr marL="1371600" indent="0">
+              <a:buNone/>
+              <a:defRPr sz="1000"/>
             </a:lvl4pPr>
-            <a:lvl5pPr marL="671901" indent="0">
-              <a:buNone/>
-              <a:defRPr sz="367"/>
+            <a:lvl5pPr marL="1828800" indent="0">
+              <a:buNone/>
+              <a:defRPr sz="1000"/>
             </a:lvl5pPr>
-            <a:lvl6pPr marL="839876" indent="0">
-              <a:buNone/>
-              <a:defRPr sz="367"/>
+            <a:lvl6pPr marL="2286000" indent="0">
+              <a:buNone/>
+              <a:defRPr sz="1000"/>
             </a:lvl6pPr>
-            <a:lvl7pPr marL="1007852" indent="0">
-              <a:buNone/>
-              <a:defRPr sz="367"/>
+            <a:lvl7pPr marL="2743200" indent="0">
+              <a:buNone/>
+              <a:defRPr sz="1000"/>
             </a:lvl7pPr>
-            <a:lvl8pPr marL="1175827" indent="0">
-              <a:buNone/>
-              <a:defRPr sz="367"/>
+            <a:lvl8pPr marL="3200400" indent="0">
+              <a:buNone/>
+              <a:defRPr sz="1000"/>
             </a:lvl8pPr>
-            <a:lvl9pPr marL="1343802" indent="0">
-              <a:buNone/>
-              <a:defRPr sz="367"/>
+            <a:lvl9pPr marL="3657600" indent="0">
+              <a:buNone/>
+              <a:defRPr sz="1000"/>
             </a:lvl9pPr>
           </a:lstStyle>
           <a:p>
@@ -2092,7 +2098,7 @@
           <a:p>
             <a:fld id="{DD923110-092B-4D02-B6E6-5995FEB1C911}" type="datetimeFigureOut">
               <a:rPr lang="en-GB" smtClean="0"/>
-              <a:t>30/09/2025</a:t>
+              <a:t>11/06/2026</a:t>
             </a:fld>
             <a:endParaRPr lang="en-GB"/>
           </a:p>
@@ -2143,7 +2149,7 @@
     </p:spTree>
     <p:extLst>
       <p:ext uri="{BB962C8B-B14F-4D97-AF65-F5344CB8AC3E}">
-        <p14:creationId xmlns:p14="http://schemas.microsoft.com/office/powerpoint/2010/main" val="2528963389"/>
+        <p14:creationId xmlns:p14="http://schemas.microsoft.com/office/powerpoint/2010/main" val="191016075"/>
       </p:ext>
     </p:extLst>
   </p:cSld>
@@ -2182,15 +2188,15 @@
         </p:nvSpPr>
         <p:spPr>
           <a:xfrm>
-            <a:off x="248000" y="167958"/>
-            <a:ext cx="1161239" cy="587851"/>
+            <a:off x="682328" y="457200"/>
+            <a:ext cx="3194943" cy="1600200"/>
           </a:xfrm>
         </p:spPr>
         <p:txBody>
           <a:bodyPr anchor="b"/>
           <a:lstStyle>
             <a:lvl1pPr>
-              <a:defRPr sz="1176"/>
+              <a:defRPr sz="3200"/>
             </a:lvl1pPr>
           </a:lstStyle>
           <a:p>
@@ -2214,8 +2220,8 @@
         </p:nvSpPr>
         <p:spPr>
           <a:xfrm>
-            <a:off x="1530660" y="362742"/>
-            <a:ext cx="1822728" cy="1790381"/>
+            <a:off x="4211340" y="987427"/>
+            <a:ext cx="5014913" cy="4873625"/>
           </a:xfrm>
         </p:spPr>
         <p:txBody>
@@ -2223,39 +2229,39 @@
           <a:lstStyle>
             <a:lvl1pPr marL="0" indent="0">
               <a:buNone/>
-              <a:defRPr sz="1176"/>
+              <a:defRPr sz="3200"/>
             </a:lvl1pPr>
-            <a:lvl2pPr marL="167975" indent="0">
-              <a:buNone/>
-              <a:defRPr sz="1029"/>
+            <a:lvl2pPr marL="457200" indent="0">
+              <a:buNone/>
+              <a:defRPr sz="2800"/>
             </a:lvl2pPr>
-            <a:lvl3pPr marL="335951" indent="0">
-              <a:buNone/>
-              <a:defRPr sz="882"/>
+            <a:lvl3pPr marL="914400" indent="0">
+              <a:buNone/>
+              <a:defRPr sz="2400"/>
             </a:lvl3pPr>
-            <a:lvl4pPr marL="503926" indent="0">
-              <a:buNone/>
-              <a:defRPr sz="735"/>
+            <a:lvl4pPr marL="1371600" indent="0">
+              <a:buNone/>
+              <a:defRPr sz="2000"/>
             </a:lvl4pPr>
-            <a:lvl5pPr marL="671901" indent="0">
-              <a:buNone/>
-              <a:defRPr sz="735"/>
+            <a:lvl5pPr marL="1828800" indent="0">
+              <a:buNone/>
+              <a:defRPr sz="2000"/>
             </a:lvl5pPr>
-            <a:lvl6pPr marL="839876" indent="0">
-              <a:buNone/>
-              <a:defRPr sz="735"/>
+            <a:lvl6pPr marL="2286000" indent="0">
+              <a:buNone/>
+              <a:defRPr sz="2000"/>
             </a:lvl6pPr>
-            <a:lvl7pPr marL="1007852" indent="0">
-              <a:buNone/>
-              <a:defRPr sz="735"/>
+            <a:lvl7pPr marL="2743200" indent="0">
+              <a:buNone/>
+              <a:defRPr sz="2000"/>
             </a:lvl7pPr>
-            <a:lvl8pPr marL="1175827" indent="0">
-              <a:buNone/>
-              <a:defRPr sz="735"/>
+            <a:lvl8pPr marL="3200400" indent="0">
+              <a:buNone/>
+              <a:defRPr sz="2000"/>
             </a:lvl8pPr>
-            <a:lvl9pPr marL="1343802" indent="0">
-              <a:buNone/>
-              <a:defRPr sz="735"/>
+            <a:lvl9pPr marL="3657600" indent="0">
+              <a:buNone/>
+              <a:defRPr sz="2000"/>
             </a:lvl9pPr>
           </a:lstStyle>
           <a:p>
@@ -2279,8 +2285,8 @@
         </p:nvSpPr>
         <p:spPr>
           <a:xfrm>
-            <a:off x="248000" y="755809"/>
-            <a:ext cx="1161239" cy="1400229"/>
+            <a:off x="682328" y="2057400"/>
+            <a:ext cx="3194943" cy="3811588"/>
           </a:xfrm>
         </p:spPr>
         <p:txBody>
@@ -2288,39 +2294,39 @@
           <a:lstStyle>
             <a:lvl1pPr marL="0" indent="0">
               <a:buNone/>
-              <a:defRPr sz="588"/>
+              <a:defRPr sz="1600"/>
             </a:lvl1pPr>
-            <a:lvl2pPr marL="167975" indent="0">
-              <a:buNone/>
-              <a:defRPr sz="514"/>
+            <a:lvl2pPr marL="457200" indent="0">
+              <a:buNone/>
+              <a:defRPr sz="1400"/>
             </a:lvl2pPr>
-            <a:lvl3pPr marL="335951" indent="0">
-              <a:buNone/>
-              <a:defRPr sz="441"/>
+            <a:lvl3pPr marL="914400" indent="0">
+              <a:buNone/>
+              <a:defRPr sz="1200"/>
             </a:lvl3pPr>
-            <a:lvl4pPr marL="503926" indent="0">
-              <a:buNone/>
-              <a:defRPr sz="367"/>
+            <a:lvl4pPr marL="1371600" indent="0">
+              <a:buNone/>
+              <a:defRPr sz="1000"/>
             </a:lvl4pPr>
-            <a:lvl5pPr marL="671901" indent="0">
-              <a:buNone/>
-              <a:defRPr sz="367"/>
+            <a:lvl5pPr marL="1828800" indent="0">
+              <a:buNone/>
+              <a:defRPr sz="1000"/>
             </a:lvl5pPr>
-            <a:lvl6pPr marL="839876" indent="0">
-              <a:buNone/>
-              <a:defRPr sz="367"/>
+            <a:lvl6pPr marL="2286000" indent="0">
+              <a:buNone/>
+              <a:defRPr sz="1000"/>
             </a:lvl6pPr>
-            <a:lvl7pPr marL="1007852" indent="0">
-              <a:buNone/>
-              <a:defRPr sz="367"/>
+            <a:lvl7pPr marL="2743200" indent="0">
+              <a:buNone/>
+              <a:defRPr sz="1000"/>
             </a:lvl7pPr>
-            <a:lvl8pPr marL="1175827" indent="0">
-              <a:buNone/>
-              <a:defRPr sz="367"/>
+            <a:lvl8pPr marL="3200400" indent="0">
+              <a:buNone/>
+              <a:defRPr sz="1000"/>
             </a:lvl8pPr>
-            <a:lvl9pPr marL="1343802" indent="0">
-              <a:buNone/>
-              <a:defRPr sz="367"/>
+            <a:lvl9pPr marL="3657600" indent="0">
+              <a:buNone/>
+              <a:defRPr sz="1000"/>
             </a:lvl9pPr>
           </a:lstStyle>
           <a:p>
@@ -2349,7 +2355,7 @@
           <a:p>
             <a:fld id="{DD923110-092B-4D02-B6E6-5995FEB1C911}" type="datetimeFigureOut">
               <a:rPr lang="en-GB" smtClean="0"/>
-              <a:t>30/09/2025</a:t>
+              <a:t>11/06/2026</a:t>
             </a:fld>
             <a:endParaRPr lang="en-GB"/>
           </a:p>
@@ -2400,7 +2406,7 @@
     </p:spTree>
     <p:extLst>
       <p:ext uri="{BB962C8B-B14F-4D97-AF65-F5344CB8AC3E}">
-        <p14:creationId xmlns:p14="http://schemas.microsoft.com/office/powerpoint/2010/main" val="3816720968"/>
+        <p14:creationId xmlns:p14="http://schemas.microsoft.com/office/powerpoint/2010/main" val="866427253"/>
       </p:ext>
     </p:extLst>
   </p:cSld>
@@ -2444,8 +2450,8 @@
         </p:nvSpPr>
         <p:spPr>
           <a:xfrm>
-            <a:off x="247531" y="134133"/>
-            <a:ext cx="3105388" cy="486960"/>
+            <a:off x="681038" y="365127"/>
+            <a:ext cx="8543925" cy="1325563"/>
           </a:xfrm>
           <a:prstGeom prst="rect">
             <a:avLst/>
@@ -2477,8 +2483,8 @@
         </p:nvSpPr>
         <p:spPr>
           <a:xfrm>
-            <a:off x="247531" y="670664"/>
-            <a:ext cx="3105388" cy="1598513"/>
+            <a:off x="681038" y="1825625"/>
+            <a:ext cx="8543925" cy="4351338"/>
           </a:xfrm>
           <a:prstGeom prst="rect">
             <a:avLst/>
@@ -2539,8 +2545,8 @@
         </p:nvSpPr>
         <p:spPr>
           <a:xfrm>
-            <a:off x="247531" y="2335077"/>
-            <a:ext cx="810101" cy="134133"/>
+            <a:off x="681038" y="6356352"/>
+            <a:ext cx="2228850" cy="365125"/>
           </a:xfrm>
           <a:prstGeom prst="rect">
             <a:avLst/>
@@ -2550,7 +2556,7 @@
           <a:bodyPr vert="horz" lIns="91440" tIns="45720" rIns="91440" bIns="45720" rtlCol="0" anchor="ctr"/>
           <a:lstStyle>
             <a:lvl1pPr algn="l">
-              <a:defRPr sz="441">
+              <a:defRPr sz="1200">
                 <a:solidFill>
                   <a:schemeClr val="tx1">
                     <a:tint val="75000"/>
@@ -2562,7 +2568,7 @@
           <a:p>
             <a:fld id="{DD923110-092B-4D02-B6E6-5995FEB1C911}" type="datetimeFigureOut">
               <a:rPr lang="en-GB" smtClean="0"/>
-              <a:t>30/09/2025</a:t>
+              <a:t>11/06/2026</a:t>
             </a:fld>
             <a:endParaRPr lang="en-GB"/>
           </a:p>
@@ -2580,8 +2586,8 @@
         </p:nvSpPr>
         <p:spPr>
           <a:xfrm>
-            <a:off x="1192649" y="2335077"/>
-            <a:ext cx="1215152" cy="134133"/>
+            <a:off x="3281363" y="6356352"/>
+            <a:ext cx="3343275" cy="365125"/>
           </a:xfrm>
           <a:prstGeom prst="rect">
             <a:avLst/>
@@ -2591,7 +2597,7 @@
           <a:bodyPr vert="horz" lIns="91440" tIns="45720" rIns="91440" bIns="45720" rtlCol="0" anchor="ctr"/>
           <a:lstStyle>
             <a:lvl1pPr algn="ctr">
-              <a:defRPr sz="441">
+              <a:defRPr sz="1200">
                 <a:solidFill>
                   <a:schemeClr val="tx1">
                     <a:tint val="75000"/>
@@ -2617,8 +2623,8 @@
         </p:nvSpPr>
         <p:spPr>
           <a:xfrm>
-            <a:off x="2542818" y="2335077"/>
-            <a:ext cx="810101" cy="134133"/>
+            <a:off x="6996113" y="6356352"/>
+            <a:ext cx="2228850" cy="365125"/>
           </a:xfrm>
           <a:prstGeom prst="rect">
             <a:avLst/>
@@ -2628,7 +2634,7 @@
           <a:bodyPr vert="horz" lIns="91440" tIns="45720" rIns="91440" bIns="45720" rtlCol="0" anchor="ctr"/>
           <a:lstStyle>
             <a:lvl1pPr algn="r">
-              <a:defRPr sz="441">
+              <a:defRPr sz="1200">
                 <a:solidFill>
                   <a:schemeClr val="tx1">
                     <a:tint val="75000"/>
@@ -2649,27 +2655,27 @@
     </p:spTree>
     <p:extLst>
       <p:ext uri="{BB962C8B-B14F-4D97-AF65-F5344CB8AC3E}">
-        <p14:creationId xmlns:p14="http://schemas.microsoft.com/office/powerpoint/2010/main" val="283175811"/>
+        <p14:creationId xmlns:p14="http://schemas.microsoft.com/office/powerpoint/2010/main" val="1495038699"/>
       </p:ext>
     </p:extLst>
   </p:cSld>
   <p:clrMap bg1="lt1" tx1="dk1" bg2="lt2" tx2="dk2" accent1="accent1" accent2="accent2" accent3="accent3" accent4="accent4" accent5="accent5" accent6="accent6" hlink="hlink" folHlink="folHlink"/>
   <p:sldLayoutIdLst>
-    <p:sldLayoutId id="2147483661" r:id="rId1"/>
-    <p:sldLayoutId id="2147483662" r:id="rId2"/>
-    <p:sldLayoutId id="2147483663" r:id="rId3"/>
-    <p:sldLayoutId id="2147483664" r:id="rId4"/>
-    <p:sldLayoutId id="2147483665" r:id="rId5"/>
-    <p:sldLayoutId id="2147483666" r:id="rId6"/>
-    <p:sldLayoutId id="2147483667" r:id="rId7"/>
-    <p:sldLayoutId id="2147483668" r:id="rId8"/>
-    <p:sldLayoutId id="2147483669" r:id="rId9"/>
-    <p:sldLayoutId id="2147483670" r:id="rId10"/>
-    <p:sldLayoutId id="2147483671" r:id="rId11"/>
+    <p:sldLayoutId id="2147483685" r:id="rId1"/>
+    <p:sldLayoutId id="2147483686" r:id="rId2"/>
+    <p:sldLayoutId id="2147483687" r:id="rId3"/>
+    <p:sldLayoutId id="2147483688" r:id="rId4"/>
+    <p:sldLayoutId id="2147483689" r:id="rId5"/>
+    <p:sldLayoutId id="2147483690" r:id="rId6"/>
+    <p:sldLayoutId id="2147483691" r:id="rId7"/>
+    <p:sldLayoutId id="2147483692" r:id="rId8"/>
+    <p:sldLayoutId id="2147483693" r:id="rId9"/>
+    <p:sldLayoutId id="2147483694" r:id="rId10"/>
+    <p:sldLayoutId id="2147483695" r:id="rId11"/>
   </p:sldLayoutIdLst>
   <p:txStyles>
     <p:titleStyle>
-      <a:lvl1pPr algn="l" defTabSz="335951" rtl="0" eaLnBrk="1" latinLnBrk="0" hangingPunct="1">
+      <a:lvl1pPr algn="l" defTabSz="914400" rtl="0" eaLnBrk="1" latinLnBrk="0" hangingPunct="1">
         <a:lnSpc>
           <a:spcPct val="90000"/>
         </a:lnSpc>
@@ -2677,7 +2683,7 @@
           <a:spcPct val="0"/>
         </a:spcBef>
         <a:buNone/>
-        <a:defRPr sz="1617" kern="1200">
+        <a:defRPr sz="4400" kern="1200">
           <a:solidFill>
             <a:schemeClr val="tx1"/>
           </a:solidFill>
@@ -2688,16 +2694,16 @@
       </a:lvl1pPr>
     </p:titleStyle>
     <p:bodyStyle>
-      <a:lvl1pPr marL="83988" indent="-83988" algn="l" defTabSz="335951" rtl="0" eaLnBrk="1" latinLnBrk="0" hangingPunct="1">
+      <a:lvl1pPr marL="228600" indent="-228600" algn="l" defTabSz="914400" rtl="0" eaLnBrk="1" latinLnBrk="0" hangingPunct="1">
         <a:lnSpc>
           <a:spcPct val="90000"/>
         </a:lnSpc>
         <a:spcBef>
-          <a:spcPts val="367"/>
+          <a:spcPts val="1000"/>
         </a:spcBef>
         <a:buFont typeface="Arial" panose="020B0604020202020204" pitchFamily="34" charset="0"/>
         <a:buChar char="•"/>
-        <a:defRPr sz="1029" kern="1200">
+        <a:defRPr sz="2800" kern="1200">
           <a:solidFill>
             <a:schemeClr val="tx1"/>
           </a:solidFill>
@@ -2706,16 +2712,16 @@
           <a:cs typeface="+mn-cs"/>
         </a:defRPr>
       </a:lvl1pPr>
-      <a:lvl2pPr marL="251963" indent="-83988" algn="l" defTabSz="335951" rtl="0" eaLnBrk="1" latinLnBrk="0" hangingPunct="1">
+      <a:lvl2pPr marL="685800" indent="-228600" algn="l" defTabSz="914400" rtl="0" eaLnBrk="1" latinLnBrk="0" hangingPunct="1">
         <a:lnSpc>
           <a:spcPct val="90000"/>
         </a:lnSpc>
         <a:spcBef>
-          <a:spcPts val="184"/>
+          <a:spcPts val="500"/>
         </a:spcBef>
         <a:buFont typeface="Arial" panose="020B0604020202020204" pitchFamily="34" charset="0"/>
         <a:buChar char="•"/>
-        <a:defRPr sz="882" kern="1200">
+        <a:defRPr sz="2400" kern="1200">
           <a:solidFill>
             <a:schemeClr val="tx1"/>
           </a:solidFill>
@@ -2724,16 +2730,16 @@
           <a:cs typeface="+mn-cs"/>
         </a:defRPr>
       </a:lvl2pPr>
-      <a:lvl3pPr marL="419938" indent="-83988" algn="l" defTabSz="335951" rtl="0" eaLnBrk="1" latinLnBrk="0" hangingPunct="1">
+      <a:lvl3pPr marL="1143000" indent="-228600" algn="l" defTabSz="914400" rtl="0" eaLnBrk="1" latinLnBrk="0" hangingPunct="1">
         <a:lnSpc>
           <a:spcPct val="90000"/>
         </a:lnSpc>
         <a:spcBef>
-          <a:spcPts val="184"/>
+          <a:spcPts val="500"/>
         </a:spcBef>
         <a:buFont typeface="Arial" panose="020B0604020202020204" pitchFamily="34" charset="0"/>
         <a:buChar char="•"/>
-        <a:defRPr sz="735" kern="1200">
+        <a:defRPr sz="2000" kern="1200">
           <a:solidFill>
             <a:schemeClr val="tx1"/>
           </a:solidFill>
@@ -2742,16 +2748,16 @@
           <a:cs typeface="+mn-cs"/>
         </a:defRPr>
       </a:lvl3pPr>
-      <a:lvl4pPr marL="587913" indent="-83988" algn="l" defTabSz="335951" rtl="0" eaLnBrk="1" latinLnBrk="0" hangingPunct="1">
+      <a:lvl4pPr marL="1600200" indent="-228600" algn="l" defTabSz="914400" rtl="0" eaLnBrk="1" latinLnBrk="0" hangingPunct="1">
         <a:lnSpc>
           <a:spcPct val="90000"/>
         </a:lnSpc>
         <a:spcBef>
-          <a:spcPts val="184"/>
+          <a:spcPts val="500"/>
         </a:spcBef>
         <a:buFont typeface="Arial" panose="020B0604020202020204" pitchFamily="34" charset="0"/>
         <a:buChar char="•"/>
-        <a:defRPr sz="661" kern="1200">
+        <a:defRPr sz="1800" kern="1200">
           <a:solidFill>
             <a:schemeClr val="tx1"/>
           </a:solidFill>
@@ -2760,16 +2766,16 @@
           <a:cs typeface="+mn-cs"/>
         </a:defRPr>
       </a:lvl4pPr>
-      <a:lvl5pPr marL="755889" indent="-83988" algn="l" defTabSz="335951" rtl="0" eaLnBrk="1" latinLnBrk="0" hangingPunct="1">
+      <a:lvl5pPr marL="2057400" indent="-228600" algn="l" defTabSz="914400" rtl="0" eaLnBrk="1" latinLnBrk="0" hangingPunct="1">
         <a:lnSpc>
           <a:spcPct val="90000"/>
         </a:lnSpc>
         <a:spcBef>
-          <a:spcPts val="184"/>
+          <a:spcPts val="500"/>
         </a:spcBef>
         <a:buFont typeface="Arial" panose="020B0604020202020204" pitchFamily="34" charset="0"/>
         <a:buChar char="•"/>
-        <a:defRPr sz="661" kern="1200">
+        <a:defRPr sz="1800" kern="1200">
           <a:solidFill>
             <a:schemeClr val="tx1"/>
           </a:solidFill>
@@ -2778,16 +2784,16 @@
           <a:cs typeface="+mn-cs"/>
         </a:defRPr>
       </a:lvl5pPr>
-      <a:lvl6pPr marL="923864" indent="-83988" algn="l" defTabSz="335951" rtl="0" eaLnBrk="1" latinLnBrk="0" hangingPunct="1">
+      <a:lvl6pPr marL="2514600" indent="-228600" algn="l" defTabSz="914400" rtl="0" eaLnBrk="1" latinLnBrk="0" hangingPunct="1">
         <a:lnSpc>
           <a:spcPct val="90000"/>
         </a:lnSpc>
         <a:spcBef>
-          <a:spcPts val="184"/>
+          <a:spcPts val="500"/>
         </a:spcBef>
         <a:buFont typeface="Arial" panose="020B0604020202020204" pitchFamily="34" charset="0"/>
         <a:buChar char="•"/>
-        <a:defRPr sz="661" kern="1200">
+        <a:defRPr sz="1800" kern="1200">
           <a:solidFill>
             <a:schemeClr val="tx1"/>
           </a:solidFill>
@@ -2796,16 +2802,16 @@
           <a:cs typeface="+mn-cs"/>
         </a:defRPr>
       </a:lvl6pPr>
-      <a:lvl7pPr marL="1091839" indent="-83988" algn="l" defTabSz="335951" rtl="0" eaLnBrk="1" latinLnBrk="0" hangingPunct="1">
+      <a:lvl7pPr marL="2971800" indent="-228600" algn="l" defTabSz="914400" rtl="0" eaLnBrk="1" latinLnBrk="0" hangingPunct="1">
         <a:lnSpc>
           <a:spcPct val="90000"/>
         </a:lnSpc>
         <a:spcBef>
-          <a:spcPts val="184"/>
+          <a:spcPts val="500"/>
         </a:spcBef>
         <a:buFont typeface="Arial" panose="020B0604020202020204" pitchFamily="34" charset="0"/>
         <a:buChar char="•"/>
-        <a:defRPr sz="661" kern="1200">
+        <a:defRPr sz="1800" kern="1200">
           <a:solidFill>
             <a:schemeClr val="tx1"/>
           </a:solidFill>
@@ -2814,16 +2820,16 @@
           <a:cs typeface="+mn-cs"/>
         </a:defRPr>
       </a:lvl7pPr>
-      <a:lvl8pPr marL="1259815" indent="-83988" algn="l" defTabSz="335951" rtl="0" eaLnBrk="1" latinLnBrk="0" hangingPunct="1">
+      <a:lvl8pPr marL="3429000" indent="-228600" algn="l" defTabSz="914400" rtl="0" eaLnBrk="1" latinLnBrk="0" hangingPunct="1">
         <a:lnSpc>
           <a:spcPct val="90000"/>
         </a:lnSpc>
         <a:spcBef>
-          <a:spcPts val="184"/>
+          <a:spcPts val="500"/>
         </a:spcBef>
         <a:buFont typeface="Arial" panose="020B0604020202020204" pitchFamily="34" charset="0"/>
         <a:buChar char="•"/>
-        <a:defRPr sz="661" kern="1200">
+        <a:defRPr sz="1800" kern="1200">
           <a:solidFill>
             <a:schemeClr val="tx1"/>
           </a:solidFill>
@@ -2832,16 +2838,16 @@
           <a:cs typeface="+mn-cs"/>
         </a:defRPr>
       </a:lvl8pPr>
-      <a:lvl9pPr marL="1427790" indent="-83988" algn="l" defTabSz="335951" rtl="0" eaLnBrk="1" latinLnBrk="0" hangingPunct="1">
+      <a:lvl9pPr marL="3886200" indent="-228600" algn="l" defTabSz="914400" rtl="0" eaLnBrk="1" latinLnBrk="0" hangingPunct="1">
         <a:lnSpc>
           <a:spcPct val="90000"/>
         </a:lnSpc>
         <a:spcBef>
-          <a:spcPts val="184"/>
+          <a:spcPts val="500"/>
         </a:spcBef>
         <a:buFont typeface="Arial" panose="020B0604020202020204" pitchFamily="34" charset="0"/>
         <a:buChar char="•"/>
-        <a:defRPr sz="661" kern="1200">
+        <a:defRPr sz="1800" kern="1200">
           <a:solidFill>
             <a:schemeClr val="tx1"/>
           </a:solidFill>
@@ -2855,8 +2861,8 @@
       <a:defPPr>
         <a:defRPr lang="en-US"/>
       </a:defPPr>
-      <a:lvl1pPr marL="0" algn="l" defTabSz="335951" rtl="0" eaLnBrk="1" latinLnBrk="0" hangingPunct="1">
-        <a:defRPr sz="661" kern="1200">
+      <a:lvl1pPr marL="0" algn="l" defTabSz="914400" rtl="0" eaLnBrk="1" latinLnBrk="0" hangingPunct="1">
+        <a:defRPr sz="1800" kern="1200">
           <a:solidFill>
             <a:schemeClr val="tx1"/>
           </a:solidFill>
@@ -2865,8 +2871,8 @@
           <a:cs typeface="+mn-cs"/>
         </a:defRPr>
       </a:lvl1pPr>
-      <a:lvl2pPr marL="167975" algn="l" defTabSz="335951" rtl="0" eaLnBrk="1" latinLnBrk="0" hangingPunct="1">
-        <a:defRPr sz="661" kern="1200">
+      <a:lvl2pPr marL="457200" algn="l" defTabSz="914400" rtl="0" eaLnBrk="1" latinLnBrk="0" hangingPunct="1">
+        <a:defRPr sz="1800" kern="1200">
           <a:solidFill>
             <a:schemeClr val="tx1"/>
           </a:solidFill>
@@ -2875,8 +2881,8 @@
           <a:cs typeface="+mn-cs"/>
         </a:defRPr>
       </a:lvl2pPr>
-      <a:lvl3pPr marL="335951" algn="l" defTabSz="335951" rtl="0" eaLnBrk="1" latinLnBrk="0" hangingPunct="1">
-        <a:defRPr sz="661" kern="1200">
+      <a:lvl3pPr marL="914400" algn="l" defTabSz="914400" rtl="0" eaLnBrk="1" latinLnBrk="0" hangingPunct="1">
+        <a:defRPr sz="1800" kern="1200">
           <a:solidFill>
             <a:schemeClr val="tx1"/>
           </a:solidFill>
@@ -2885,8 +2891,8 @@
           <a:cs typeface="+mn-cs"/>
         </a:defRPr>
       </a:lvl3pPr>
-      <a:lvl4pPr marL="503926" algn="l" defTabSz="335951" rtl="0" eaLnBrk="1" latinLnBrk="0" hangingPunct="1">
-        <a:defRPr sz="661" kern="1200">
+      <a:lvl4pPr marL="1371600" algn="l" defTabSz="914400" rtl="0" eaLnBrk="1" latinLnBrk="0" hangingPunct="1">
+        <a:defRPr sz="1800" kern="1200">
           <a:solidFill>
             <a:schemeClr val="tx1"/>
           </a:solidFill>
@@ -2895,8 +2901,8 @@
           <a:cs typeface="+mn-cs"/>
         </a:defRPr>
       </a:lvl4pPr>
-      <a:lvl5pPr marL="671901" algn="l" defTabSz="335951" rtl="0" eaLnBrk="1" latinLnBrk="0" hangingPunct="1">
-        <a:defRPr sz="661" kern="1200">
+      <a:lvl5pPr marL="1828800" algn="l" defTabSz="914400" rtl="0" eaLnBrk="1" latinLnBrk="0" hangingPunct="1">
+        <a:defRPr sz="1800" kern="1200">
           <a:solidFill>
             <a:schemeClr val="tx1"/>
           </a:solidFill>
@@ -2905,8 +2911,8 @@
           <a:cs typeface="+mn-cs"/>
         </a:defRPr>
       </a:lvl5pPr>
-      <a:lvl6pPr marL="839876" algn="l" defTabSz="335951" rtl="0" eaLnBrk="1" latinLnBrk="0" hangingPunct="1">
-        <a:defRPr sz="661" kern="1200">
+      <a:lvl6pPr marL="2286000" algn="l" defTabSz="914400" rtl="0" eaLnBrk="1" latinLnBrk="0" hangingPunct="1">
+        <a:defRPr sz="1800" kern="1200">
           <a:solidFill>
             <a:schemeClr val="tx1"/>
           </a:solidFill>
@@ -2915,8 +2921,8 @@
           <a:cs typeface="+mn-cs"/>
         </a:defRPr>
       </a:lvl6pPr>
-      <a:lvl7pPr marL="1007852" algn="l" defTabSz="335951" rtl="0" eaLnBrk="1" latinLnBrk="0" hangingPunct="1">
-        <a:defRPr sz="661" kern="1200">
+      <a:lvl7pPr marL="2743200" algn="l" defTabSz="914400" rtl="0" eaLnBrk="1" latinLnBrk="0" hangingPunct="1">
+        <a:defRPr sz="1800" kern="1200">
           <a:solidFill>
             <a:schemeClr val="tx1"/>
           </a:solidFill>
@@ -2925,8 +2931,8 @@
           <a:cs typeface="+mn-cs"/>
         </a:defRPr>
       </a:lvl7pPr>
-      <a:lvl8pPr marL="1175827" algn="l" defTabSz="335951" rtl="0" eaLnBrk="1" latinLnBrk="0" hangingPunct="1">
-        <a:defRPr sz="661" kern="1200">
+      <a:lvl8pPr marL="3200400" algn="l" defTabSz="914400" rtl="0" eaLnBrk="1" latinLnBrk="0" hangingPunct="1">
+        <a:defRPr sz="1800" kern="1200">
           <a:solidFill>
             <a:schemeClr val="tx1"/>
           </a:solidFill>
@@ -2935,8 +2941,8 @@
           <a:cs typeface="+mn-cs"/>
         </a:defRPr>
       </a:lvl8pPr>
-      <a:lvl9pPr marL="1343802" algn="l" defTabSz="335951" rtl="0" eaLnBrk="1" latinLnBrk="0" hangingPunct="1">
-        <a:defRPr sz="661" kern="1200">
+      <a:lvl9pPr marL="3657600" algn="l" defTabSz="914400" rtl="0" eaLnBrk="1" latinLnBrk="0" hangingPunct="1">
+        <a:defRPr sz="1800" kern="1200">
           <a:solidFill>
             <a:schemeClr val="tx1"/>
           </a:solidFill>
@@ -2969,65 +2975,6 @@
       </p:grpSpPr>
       <p:sp>
         <p:nvSpPr>
-          <p:cNvPr id="4" name="Hexagon 3">
-            <a:extLst>
-              <a:ext uri="{FF2B5EF4-FFF2-40B4-BE49-F238E27FC236}">
-                <a16:creationId xmlns:a16="http://schemas.microsoft.com/office/drawing/2014/main" id="{CED665F1-C102-423E-9E0A-B561C323F14A}"/>
-              </a:ext>
-            </a:extLst>
-          </p:cNvPr>
-          <p:cNvSpPr/>
-          <p:nvPr/>
-        </p:nvSpPr>
-        <p:spPr>
-          <a:xfrm>
-            <a:off x="2147534" y="752149"/>
-            <a:ext cx="1280160" cy="948448"/>
-          </a:xfrm>
-          <a:prstGeom prst="hexagon">
-            <a:avLst/>
-          </a:prstGeom>
-          <a:solidFill>
-            <a:schemeClr val="bg1"/>
-          </a:solidFill>
-          <a:ln w="28575">
-            <a:solidFill>
-              <a:schemeClr val="tx1"/>
-            </a:solidFill>
-          </a:ln>
-        </p:spPr>
-        <p:style>
-          <a:lnRef idx="2">
-            <a:schemeClr val="accent6"/>
-          </a:lnRef>
-          <a:fillRef idx="1">
-            <a:schemeClr val="lt1"/>
-          </a:fillRef>
-          <a:effectRef idx="0">
-            <a:schemeClr val="accent6"/>
-          </a:effectRef>
-          <a:fontRef idx="minor">
-            <a:schemeClr val="dk1"/>
-          </a:fontRef>
-        </p:style>
-        <p:txBody>
-          <a:bodyPr rtlCol="0" anchor="ctr"/>
-          <a:lstStyle/>
-          <a:p>
-            <a:pPr algn="ctr"/>
-            <a:r>
-              <a:rPr lang="en-GB" sz="1000" dirty="0">
-                <a:solidFill>
-                  <a:schemeClr val="tx1"/>
-                </a:solidFill>
-              </a:rPr>
-              <a:t>COMPONENT</a:t>
-            </a:r>
-          </a:p>
-        </p:txBody>
-      </p:sp>
-      <p:sp>
-        <p:nvSpPr>
           <p:cNvPr id="5" name="Rectangle 4">
             <a:extLst>
               <a:ext uri="{FF2B5EF4-FFF2-40B4-BE49-F238E27FC236}">
@@ -3040,8 +2987,8 @@
         </p:nvSpPr>
         <p:spPr>
           <a:xfrm>
-            <a:off x="449039" y="310954"/>
-            <a:ext cx="799245" cy="432184"/>
+            <a:off x="1393022" y="1301450"/>
+            <a:ext cx="2175639" cy="1176456"/>
           </a:xfrm>
           <a:prstGeom prst="rect">
             <a:avLst/>
@@ -3049,7 +2996,7 @@
           <a:solidFill>
             <a:schemeClr val="bg1"/>
           </a:solidFill>
-          <a:ln w="28575">
+          <a:ln w="57150">
             <a:solidFill>
               <a:schemeClr val="tx1"/>
             </a:solidFill>
@@ -3077,22 +3024,67 @@
           <a:p>
             <a:pPr algn="ctr"/>
             <a:r>
-              <a:rPr lang="en-GB" sz="1200" dirty="0">
+              <a:rPr lang="en-GB" sz="2722" dirty="0">
                 <a:solidFill>
                   <a:schemeClr val="tx1"/>
                 </a:solidFill>
               </a:rPr>
-              <a:t>Variable 1</a:t>
-            </a:r>
-          </a:p>
-        </p:txBody>
-      </p:sp>
-      <p:sp>
-        <p:nvSpPr>
-          <p:cNvPr id="8" name="Rectangle 7">
+              <a:t>observed variable</a:t>
+            </a:r>
+          </a:p>
+        </p:txBody>
+      </p:sp>
+      <p:cxnSp>
+        <p:nvCxnSpPr>
+          <p:cNvPr id="13" name="Straight Arrow Connector 12">
             <a:extLst>
               <a:ext uri="{FF2B5EF4-FFF2-40B4-BE49-F238E27FC236}">
-                <a16:creationId xmlns:a16="http://schemas.microsoft.com/office/drawing/2014/main" id="{B7A6A47D-AC10-44F1-8646-7A14888A6718}"/>
+                <a16:creationId xmlns:a16="http://schemas.microsoft.com/office/drawing/2014/main" id="{F467A928-E35E-4572-BA6E-2819DD6C02B0}"/>
+              </a:ext>
+            </a:extLst>
+          </p:cNvPr>
+          <p:cNvCxnSpPr>
+            <a:cxnSpLocks/>
+          </p:cNvCxnSpPr>
+          <p:nvPr/>
+        </p:nvCxnSpPr>
+        <p:spPr>
+          <a:xfrm>
+            <a:off x="1253007" y="4879703"/>
+            <a:ext cx="2455663" cy="0"/>
+          </a:xfrm>
+          <a:prstGeom prst="straightConnector1">
+            <a:avLst/>
+          </a:prstGeom>
+          <a:ln w="57150">
+            <a:solidFill>
+              <a:schemeClr val="tx1"/>
+            </a:solidFill>
+            <a:headEnd type="none" w="med" len="med"/>
+            <a:tailEnd type="arrow" w="med" len="med"/>
+          </a:ln>
+        </p:spPr>
+        <p:style>
+          <a:lnRef idx="1">
+            <a:schemeClr val="accent1"/>
+          </a:lnRef>
+          <a:fillRef idx="0">
+            <a:schemeClr val="accent1"/>
+          </a:fillRef>
+          <a:effectRef idx="0">
+            <a:schemeClr val="accent1"/>
+          </a:effectRef>
+          <a:fontRef idx="minor">
+            <a:schemeClr val="tx1"/>
+          </a:fontRef>
+        </p:style>
+      </p:cxnSp>
+      <p:sp>
+        <p:nvSpPr>
+          <p:cNvPr id="10" name="Oval 9">
+            <a:extLst>
+              <a:ext uri="{FF2B5EF4-FFF2-40B4-BE49-F238E27FC236}">
+                <a16:creationId xmlns:a16="http://schemas.microsoft.com/office/drawing/2014/main" id="{ECBE496F-C776-4F26-B647-B99873913EEC}"/>
               </a:ext>
             </a:extLst>
           </p:cNvPr>
@@ -3101,16 +3093,16 @@
         </p:nvSpPr>
         <p:spPr>
           <a:xfrm>
-            <a:off x="449040" y="1043589"/>
-            <a:ext cx="799245" cy="432184"/>
+            <a:off x="5673136" y="892045"/>
+            <a:ext cx="3165376" cy="1704119"/>
           </a:xfrm>
-          <a:prstGeom prst="rect">
+          <a:prstGeom prst="ellipse">
             <a:avLst/>
           </a:prstGeom>
           <a:solidFill>
             <a:schemeClr val="bg1"/>
           </a:solidFill>
-          <a:ln w="28575">
+          <a:ln w="57150">
             <a:solidFill>
               <a:schemeClr val="tx1"/>
             </a:solidFill>
@@ -3138,22 +3130,179 @@
           <a:p>
             <a:pPr algn="ctr"/>
             <a:r>
-              <a:rPr lang="en-GB" sz="1200" dirty="0">
+              <a:rPr lang="en-GB" sz="2722" dirty="0">
                 <a:solidFill>
                   <a:schemeClr val="tx1"/>
                 </a:solidFill>
               </a:rPr>
-              <a:t>Variable 2</a:t>
-            </a:r>
-          </a:p>
-        </p:txBody>
-      </p:sp>
-      <p:sp>
-        <p:nvSpPr>
-          <p:cNvPr id="9" name="Rectangle 8">
+              <a:t>unobserved variable</a:t>
+            </a:r>
+          </a:p>
+        </p:txBody>
+      </p:sp>
+      <p:sp>
+        <p:nvSpPr>
+          <p:cNvPr id="3" name="TextBox 2">
             <a:extLst>
               <a:ext uri="{FF2B5EF4-FFF2-40B4-BE49-F238E27FC236}">
-                <a16:creationId xmlns:a16="http://schemas.microsoft.com/office/drawing/2014/main" id="{A725A8B1-C4BD-41A9-966A-6D00723E74CF}"/>
+                <a16:creationId xmlns:a16="http://schemas.microsoft.com/office/drawing/2014/main" id="{C863047A-0619-4950-8953-B4165A145B61}"/>
+              </a:ext>
+            </a:extLst>
+          </p:cNvPr>
+          <p:cNvSpPr txBox="1"/>
+          <p:nvPr/>
+        </p:nvSpPr>
+        <p:spPr>
+          <a:xfrm>
+            <a:off x="1588001" y="4209461"/>
+            <a:ext cx="1650195" cy="930126"/>
+          </a:xfrm>
+          <a:prstGeom prst="rect">
+            <a:avLst/>
+          </a:prstGeom>
+          <a:noFill/>
+          <a:ln w="57150">
+            <a:noFill/>
+          </a:ln>
+        </p:spPr>
+        <p:txBody>
+          <a:bodyPr wrap="none" rtlCol="0">
+            <a:spAutoFit/>
+          </a:bodyPr>
+          <a:lstStyle/>
+          <a:p>
+            <a:pPr algn="ctr"/>
+            <a:r>
+              <a:rPr lang="en-GB" sz="2722" dirty="0"/>
+              <a:t>regression</a:t>
+            </a:r>
+            <a:br>
+              <a:rPr lang="en-GB" sz="2722" dirty="0"/>
+            </a:br>
+            <a:endParaRPr lang="en-GB" sz="2722" dirty="0"/>
+          </a:p>
+        </p:txBody>
+      </p:sp>
+      <p:cxnSp>
+        <p:nvCxnSpPr>
+          <p:cNvPr id="18" name="Straight Arrow Connector 17">
+            <a:extLst>
+              <a:ext uri="{FF2B5EF4-FFF2-40B4-BE49-F238E27FC236}">
+                <a16:creationId xmlns:a16="http://schemas.microsoft.com/office/drawing/2014/main" id="{CA7196ED-79D2-4A21-B462-9992D0896200}"/>
+              </a:ext>
+            </a:extLst>
+          </p:cNvPr>
+          <p:cNvCxnSpPr>
+            <a:cxnSpLocks/>
+          </p:cNvCxnSpPr>
+          <p:nvPr/>
+        </p:nvCxnSpPr>
+        <p:spPr>
+          <a:xfrm>
+            <a:off x="5825285" y="4895622"/>
+            <a:ext cx="2455663" cy="0"/>
+          </a:xfrm>
+          <a:prstGeom prst="straightConnector1">
+            <a:avLst/>
+          </a:prstGeom>
+          <a:ln w="57150">
+            <a:solidFill>
+              <a:schemeClr val="tx1"/>
+            </a:solidFill>
+            <a:headEnd type="arrow" w="med" len="med"/>
+            <a:tailEnd type="arrow" w="med" len="med"/>
+          </a:ln>
+        </p:spPr>
+        <p:style>
+          <a:lnRef idx="1">
+            <a:schemeClr val="accent1"/>
+          </a:lnRef>
+          <a:fillRef idx="0">
+            <a:schemeClr val="accent1"/>
+          </a:fillRef>
+          <a:effectRef idx="0">
+            <a:schemeClr val="accent1"/>
+          </a:effectRef>
+          <a:fontRef idx="minor">
+            <a:schemeClr val="tx1"/>
+          </a:fontRef>
+        </p:style>
+      </p:cxnSp>
+      <p:sp>
+        <p:nvSpPr>
+          <p:cNvPr id="19" name="TextBox 18">
+            <a:extLst>
+              <a:ext uri="{FF2B5EF4-FFF2-40B4-BE49-F238E27FC236}">
+                <a16:creationId xmlns:a16="http://schemas.microsoft.com/office/drawing/2014/main" id="{E9E928FD-9888-46C9-ABF4-F3C008CAAB69}"/>
+              </a:ext>
+            </a:extLst>
+          </p:cNvPr>
+          <p:cNvSpPr txBox="1"/>
+          <p:nvPr/>
+        </p:nvSpPr>
+        <p:spPr>
+          <a:xfrm>
+            <a:off x="6201726" y="4227304"/>
+            <a:ext cx="1702774" cy="511230"/>
+          </a:xfrm>
+          <a:prstGeom prst="rect">
+            <a:avLst/>
+          </a:prstGeom>
+          <a:noFill/>
+          <a:ln w="57150">
+            <a:noFill/>
+          </a:ln>
+        </p:spPr>
+        <p:txBody>
+          <a:bodyPr wrap="none" rtlCol="0">
+            <a:spAutoFit/>
+          </a:bodyPr>
+          <a:lstStyle/>
+          <a:p>
+            <a:pPr algn="ctr"/>
+            <a:r>
+              <a:rPr lang="en-GB" sz="2722" dirty="0"/>
+              <a:t>covariance</a:t>
+            </a:r>
+          </a:p>
+        </p:txBody>
+      </p:sp>
+    </p:spTree>
+    <p:extLst>
+      <p:ext uri="{BB962C8B-B14F-4D97-AF65-F5344CB8AC3E}">
+        <p14:creationId xmlns:p14="http://schemas.microsoft.com/office/powerpoint/2010/main" val="2245719386"/>
+      </p:ext>
+    </p:extLst>
+  </p:cSld>
+  <p:clrMapOvr>
+    <a:masterClrMapping/>
+  </p:clrMapOvr>
+</p:sld>
+</file>
+
+<file path=ppt/slides/slide2.xml><?xml version="1.0" encoding="utf-8"?>
+<p:sld xmlns:a="http://schemas.openxmlformats.org/drawingml/2006/main" xmlns:r="http://schemas.openxmlformats.org/officeDocument/2006/relationships" xmlns:p="http://schemas.openxmlformats.org/presentationml/2006/main">
+  <p:cSld>
+    <p:spTree>
+      <p:nvGrpSpPr>
+        <p:cNvPr id="1" name=""/>
+        <p:cNvGrpSpPr/>
+        <p:nvPr/>
+      </p:nvGrpSpPr>
+      <p:grpSpPr>
+        <a:xfrm>
+          <a:off x="0" y="0"/>
+          <a:ext cx="0" cy="0"/>
+          <a:chOff x="0" y="0"/>
+          <a:chExt cx="0" cy="0"/>
+        </a:xfrm>
+      </p:grpSpPr>
+      <p:sp>
+        <p:nvSpPr>
+          <p:cNvPr id="4" name="Hexagon 3">
+            <a:extLst>
+              <a:ext uri="{FF2B5EF4-FFF2-40B4-BE49-F238E27FC236}">
+                <a16:creationId xmlns:a16="http://schemas.microsoft.com/office/drawing/2014/main" id="{CED665F1-C102-423E-9E0A-B561C323F14A}"/>
               </a:ext>
             </a:extLst>
           </p:cNvPr>
@@ -3162,8 +3311,67 @@
         </p:nvSpPr>
         <p:spPr>
           <a:xfrm>
-            <a:off x="449039" y="1776225"/>
-            <a:ext cx="799245" cy="432184"/>
+            <a:off x="5898416" y="2047438"/>
+            <a:ext cx="3484746" cy="2581787"/>
+          </a:xfrm>
+          <a:prstGeom prst="hexagon">
+            <a:avLst/>
+          </a:prstGeom>
+          <a:solidFill>
+            <a:schemeClr val="bg1"/>
+          </a:solidFill>
+          <a:ln w="57150">
+            <a:solidFill>
+              <a:schemeClr val="tx1"/>
+            </a:solidFill>
+          </a:ln>
+        </p:spPr>
+        <p:style>
+          <a:lnRef idx="2">
+            <a:schemeClr val="accent6"/>
+          </a:lnRef>
+          <a:fillRef idx="1">
+            <a:schemeClr val="lt1"/>
+          </a:fillRef>
+          <a:effectRef idx="0">
+            <a:schemeClr val="accent6"/>
+          </a:effectRef>
+          <a:fontRef idx="minor">
+            <a:schemeClr val="dk1"/>
+          </a:fontRef>
+        </p:style>
+        <p:txBody>
+          <a:bodyPr rtlCol="0" anchor="ctr"/>
+          <a:lstStyle/>
+          <a:p>
+            <a:pPr algn="ctr"/>
+            <a:r>
+              <a:rPr lang="en-GB" sz="2722" dirty="0">
+                <a:solidFill>
+                  <a:schemeClr val="tx1"/>
+                </a:solidFill>
+              </a:rPr>
+              <a:t>COMPONENT</a:t>
+            </a:r>
+          </a:p>
+        </p:txBody>
+      </p:sp>
+      <p:sp>
+        <p:nvSpPr>
+          <p:cNvPr id="5" name="Rectangle 4">
+            <a:extLst>
+              <a:ext uri="{FF2B5EF4-FFF2-40B4-BE49-F238E27FC236}">
+                <a16:creationId xmlns:a16="http://schemas.microsoft.com/office/drawing/2014/main" id="{7EF07CC3-FDA5-4948-9230-EE00F5D20B78}"/>
+              </a:ext>
+            </a:extLst>
+          </p:cNvPr>
+          <p:cNvSpPr/>
+          <p:nvPr/>
+        </p:nvSpPr>
+        <p:spPr>
+          <a:xfrm>
+            <a:off x="1274917" y="846454"/>
+            <a:ext cx="2175639" cy="1176456"/>
           </a:xfrm>
           <a:prstGeom prst="rect">
             <a:avLst/>
@@ -3171,7 +3379,7 @@
           <a:solidFill>
             <a:schemeClr val="bg1"/>
           </a:solidFill>
-          <a:ln w="28575">
+          <a:ln w="57150">
             <a:solidFill>
               <a:schemeClr val="tx1"/>
             </a:solidFill>
@@ -3199,7 +3407,129 @@
           <a:p>
             <a:pPr algn="ctr"/>
             <a:r>
-              <a:rPr lang="en-GB" sz="1200" dirty="0">
+              <a:rPr lang="en-GB" sz="3267" dirty="0">
+                <a:solidFill>
+                  <a:schemeClr val="tx1"/>
+                </a:solidFill>
+              </a:rPr>
+              <a:t>Variable 1</a:t>
+            </a:r>
+          </a:p>
+        </p:txBody>
+      </p:sp>
+      <p:sp>
+        <p:nvSpPr>
+          <p:cNvPr id="8" name="Rectangle 7">
+            <a:extLst>
+              <a:ext uri="{FF2B5EF4-FFF2-40B4-BE49-F238E27FC236}">
+                <a16:creationId xmlns:a16="http://schemas.microsoft.com/office/drawing/2014/main" id="{B7A6A47D-AC10-44F1-8646-7A14888A6718}"/>
+              </a:ext>
+            </a:extLst>
+          </p:cNvPr>
+          <p:cNvSpPr/>
+          <p:nvPr/>
+        </p:nvSpPr>
+        <p:spPr>
+          <a:xfrm>
+            <a:off x="1274920" y="2840772"/>
+            <a:ext cx="2175639" cy="1176456"/>
+          </a:xfrm>
+          <a:prstGeom prst="rect">
+            <a:avLst/>
+          </a:prstGeom>
+          <a:solidFill>
+            <a:schemeClr val="bg1"/>
+          </a:solidFill>
+          <a:ln w="57150">
+            <a:solidFill>
+              <a:schemeClr val="tx1"/>
+            </a:solidFill>
+          </a:ln>
+        </p:spPr>
+        <p:style>
+          <a:lnRef idx="2">
+            <a:schemeClr val="accent1">
+              <a:shade val="50000"/>
+            </a:schemeClr>
+          </a:lnRef>
+          <a:fillRef idx="1">
+            <a:schemeClr val="accent1"/>
+          </a:fillRef>
+          <a:effectRef idx="0">
+            <a:schemeClr val="accent1"/>
+          </a:effectRef>
+          <a:fontRef idx="minor">
+            <a:schemeClr val="lt1"/>
+          </a:fontRef>
+        </p:style>
+        <p:txBody>
+          <a:bodyPr rtlCol="0" anchor="ctr"/>
+          <a:lstStyle/>
+          <a:p>
+            <a:pPr algn="ctr"/>
+            <a:r>
+              <a:rPr lang="en-GB" sz="3267" dirty="0">
+                <a:solidFill>
+                  <a:schemeClr val="tx1"/>
+                </a:solidFill>
+              </a:rPr>
+              <a:t>Variable 2</a:t>
+            </a:r>
+          </a:p>
+        </p:txBody>
+      </p:sp>
+      <p:sp>
+        <p:nvSpPr>
+          <p:cNvPr id="9" name="Rectangle 8">
+            <a:extLst>
+              <a:ext uri="{FF2B5EF4-FFF2-40B4-BE49-F238E27FC236}">
+                <a16:creationId xmlns:a16="http://schemas.microsoft.com/office/drawing/2014/main" id="{A725A8B1-C4BD-41A9-966A-6D00723E74CF}"/>
+              </a:ext>
+            </a:extLst>
+          </p:cNvPr>
+          <p:cNvSpPr/>
+          <p:nvPr/>
+        </p:nvSpPr>
+        <p:spPr>
+          <a:xfrm>
+            <a:off x="1274917" y="4835093"/>
+            <a:ext cx="2175639" cy="1176456"/>
+          </a:xfrm>
+          <a:prstGeom prst="rect">
+            <a:avLst/>
+          </a:prstGeom>
+          <a:solidFill>
+            <a:schemeClr val="bg1"/>
+          </a:solidFill>
+          <a:ln w="57150">
+            <a:solidFill>
+              <a:schemeClr val="tx1"/>
+            </a:solidFill>
+          </a:ln>
+        </p:spPr>
+        <p:style>
+          <a:lnRef idx="2">
+            <a:schemeClr val="accent1">
+              <a:shade val="50000"/>
+            </a:schemeClr>
+          </a:lnRef>
+          <a:fillRef idx="1">
+            <a:schemeClr val="accent1"/>
+          </a:fillRef>
+          <a:effectRef idx="0">
+            <a:schemeClr val="accent1"/>
+          </a:effectRef>
+          <a:fontRef idx="minor">
+            <a:schemeClr val="lt1"/>
+          </a:fontRef>
+        </p:style>
+        <p:txBody>
+          <a:bodyPr rtlCol="0" anchor="ctr"/>
+          <a:lstStyle/>
+          <a:p>
+            <a:pPr algn="ctr"/>
+            <a:r>
+              <a:rPr lang="en-GB" sz="3267" dirty="0">
                 <a:solidFill>
                   <a:schemeClr val="tx1"/>
                 </a:solidFill>
@@ -3226,13 +3556,13 @@
         </p:nvCxnSpPr>
         <p:spPr>
           <a:xfrm>
-            <a:off x="1248284" y="527046"/>
-            <a:ext cx="941051" cy="585909"/>
+            <a:off x="3450556" y="1434686"/>
+            <a:ext cx="2561651" cy="1594913"/>
           </a:xfrm>
           <a:prstGeom prst="straightConnector1">
             <a:avLst/>
           </a:prstGeom>
-          <a:ln w="28575">
+          <a:ln w="57150">
             <a:solidFill>
               <a:schemeClr val="tx1"/>
             </a:solidFill>
@@ -3272,13 +3602,13 @@
         </p:nvCxnSpPr>
         <p:spPr>
           <a:xfrm flipV="1">
-            <a:off x="1248285" y="1226373"/>
-            <a:ext cx="899249" cy="33308"/>
+            <a:off x="3450559" y="3338332"/>
+            <a:ext cx="2447861" cy="90668"/>
           </a:xfrm>
           <a:prstGeom prst="straightConnector1">
             <a:avLst/>
           </a:prstGeom>
-          <a:ln w="28575">
+          <a:ln w="57150">
             <a:solidFill>
               <a:schemeClr val="tx1"/>
             </a:solidFill>
@@ -3318,13 +3648,13 @@
         </p:nvCxnSpPr>
         <p:spPr>
           <a:xfrm flipV="1">
-            <a:off x="1248284" y="1338058"/>
-            <a:ext cx="941051" cy="654259"/>
+            <a:off x="3450556" y="3642355"/>
+            <a:ext cx="2561651" cy="1780970"/>
           </a:xfrm>
           <a:prstGeom prst="straightConnector1">
             <a:avLst/>
           </a:prstGeom>
-          <a:ln w="28575">
+          <a:ln w="57150">
             <a:solidFill>
               <a:schemeClr val="tx1"/>
             </a:solidFill>
@@ -3360,7 +3690,7 @@
 </p:sld>
 </file>
 
-<file path=ppt/slides/slide2.xml><?xml version="1.0" encoding="utf-8"?>
+<file path=ppt/slides/slide3.xml><?xml version="1.0" encoding="utf-8"?>
 <p:sld xmlns:a="http://schemas.openxmlformats.org/drawingml/2006/main" xmlns:r="http://schemas.openxmlformats.org/officeDocument/2006/relationships" xmlns:p="http://schemas.openxmlformats.org/presentationml/2006/main">
   <p:cSld>
     <p:spTree>
@@ -3391,8 +3721,8 @@
         </p:nvSpPr>
         <p:spPr>
           <a:xfrm>
-            <a:off x="2413682" y="310954"/>
-            <a:ext cx="799245" cy="432184"/>
+            <a:off x="6622906" y="846454"/>
+            <a:ext cx="2175639" cy="1176456"/>
           </a:xfrm>
           <a:prstGeom prst="rect">
             <a:avLst/>
@@ -3400,7 +3730,7 @@
           <a:solidFill>
             <a:schemeClr val="bg1"/>
           </a:solidFill>
-          <a:ln w="28575">
+          <a:ln w="57150">
             <a:solidFill>
               <a:schemeClr val="tx1"/>
             </a:solidFill>
@@ -3428,7 +3758,7 @@
           <a:p>
             <a:pPr algn="ctr"/>
             <a:r>
-              <a:rPr lang="en-GB" sz="1200" dirty="0">
+              <a:rPr lang="en-GB" sz="3267" dirty="0">
                 <a:solidFill>
                   <a:schemeClr val="tx1"/>
                 </a:solidFill>
@@ -3452,8 +3782,8 @@
         </p:nvSpPr>
         <p:spPr>
           <a:xfrm>
-            <a:off x="2413683" y="1043589"/>
-            <a:ext cx="799245" cy="432184"/>
+            <a:off x="6622908" y="2840772"/>
+            <a:ext cx="2175639" cy="1176456"/>
           </a:xfrm>
           <a:prstGeom prst="rect">
             <a:avLst/>
@@ -3461,7 +3791,7 @@
           <a:solidFill>
             <a:schemeClr val="bg1"/>
           </a:solidFill>
-          <a:ln w="28575">
+          <a:ln w="57150">
             <a:solidFill>
               <a:schemeClr val="tx1"/>
             </a:solidFill>
@@ -3489,7 +3819,7 @@
           <a:p>
             <a:pPr algn="ctr"/>
             <a:r>
-              <a:rPr lang="en-GB" sz="1200" dirty="0">
+              <a:rPr lang="en-GB" sz="3267" dirty="0">
                 <a:solidFill>
                   <a:schemeClr val="tx1"/>
                 </a:solidFill>
@@ -3513,8 +3843,8 @@
         </p:nvSpPr>
         <p:spPr>
           <a:xfrm>
-            <a:off x="2413682" y="1776225"/>
-            <a:ext cx="799245" cy="432184"/>
+            <a:off x="6622906" y="4835093"/>
+            <a:ext cx="2175639" cy="1176456"/>
           </a:xfrm>
           <a:prstGeom prst="rect">
             <a:avLst/>
@@ -3522,7 +3852,7 @@
           <a:solidFill>
             <a:schemeClr val="bg1"/>
           </a:solidFill>
-          <a:ln w="28575">
+          <a:ln w="57150">
             <a:solidFill>
               <a:schemeClr val="tx1"/>
             </a:solidFill>
@@ -3550,7 +3880,7 @@
           <a:p>
             <a:pPr algn="ctr"/>
             <a:r>
-              <a:rPr lang="en-GB" sz="1200" dirty="0">
+              <a:rPr lang="en-GB" sz="3267" dirty="0">
                 <a:solidFill>
                   <a:schemeClr val="tx1"/>
                 </a:solidFill>
@@ -3577,13 +3907,13 @@
         </p:nvCxnSpPr>
         <p:spPr>
           <a:xfrm flipV="1">
-            <a:off x="1651145" y="527046"/>
-            <a:ext cx="762537" cy="589760"/>
+            <a:off x="4547191" y="1434682"/>
+            <a:ext cx="2075715" cy="1605396"/>
           </a:xfrm>
           <a:prstGeom prst="straightConnector1">
             <a:avLst/>
           </a:prstGeom>
-          <a:ln w="28575">
+          <a:ln w="57150">
             <a:solidFill>
               <a:schemeClr val="tx1"/>
             </a:solidFill>
@@ -3624,13 +3954,13 @@
         </p:nvCxnSpPr>
         <p:spPr>
           <a:xfrm flipV="1">
-            <a:off x="1690502" y="1259681"/>
-            <a:ext cx="723181" cy="4360"/>
+            <a:off x="4654325" y="3429000"/>
+            <a:ext cx="1968583" cy="11868"/>
           </a:xfrm>
           <a:prstGeom prst="straightConnector1">
             <a:avLst/>
           </a:prstGeom>
-          <a:ln w="28575">
+          <a:ln w="57150">
             <a:solidFill>
               <a:schemeClr val="tx1"/>
             </a:solidFill>
@@ -3670,13 +4000,13 @@
         </p:nvCxnSpPr>
         <p:spPr>
           <a:xfrm>
-            <a:off x="1651145" y="1416015"/>
-            <a:ext cx="762537" cy="576302"/>
+            <a:off x="4547191" y="3854559"/>
+            <a:ext cx="2075715" cy="1568762"/>
           </a:xfrm>
           <a:prstGeom prst="straightConnector1">
             <a:avLst/>
           </a:prstGeom>
-          <a:ln w="28575">
+          <a:ln w="57150">
             <a:solidFill>
               <a:schemeClr val="tx1"/>
             </a:solidFill>
@@ -3713,8 +4043,8 @@
         </p:nvSpPr>
         <p:spPr>
           <a:xfrm>
-            <a:off x="321196" y="789817"/>
-            <a:ext cx="1369306" cy="948448"/>
+            <a:off x="926910" y="2149975"/>
+            <a:ext cx="3727411" cy="2581787"/>
           </a:xfrm>
           <a:prstGeom prst="ellipse">
             <a:avLst/>
@@ -3722,7 +4052,7 @@
           <a:solidFill>
             <a:schemeClr val="bg1"/>
           </a:solidFill>
-          <a:ln w="28575">
+          <a:ln w="57150">
             <a:solidFill>
               <a:schemeClr val="tx1"/>
             </a:solidFill>
@@ -3750,7 +4080,7 @@
           <a:p>
             <a:pPr algn="ctr"/>
             <a:r>
-              <a:rPr lang="en-GB" dirty="0">
+              <a:rPr lang="en-GB" sz="6000" dirty="0">
                 <a:solidFill>
                   <a:schemeClr val="tx1"/>
                 </a:solidFill>
